--- a/docs/PitchDeck.pptx
+++ b/docs/PitchDeck.pptx
@@ -17,6 +17,8 @@
     <p:sldId id="265" r:id="rId11"/>
     <p:sldId id="266" r:id="rId12"/>
     <p:sldId id="267" r:id="rId13"/>
+    <p:sldId id="269" r:id="rId20"/>
+    <p:sldId id="270" r:id="rId21"/>
     <p:sldId id="268" r:id="rId14"/>
   </p:sldIdLst>
   <p:notesMasterIdLst>
@@ -2207,7 +2209,7 @@
                 <a:ea typeface="Consolas" pitchFamily="34" charset="-122"/>
                 <a:cs typeface="Consolas" pitchFamily="34" charset="-120"/>
               </a:rPr>
-              <a:t>4인  ·  10일  ·  2026.08.12 — 08.21</a:t>
+              <a:t>2026.08.12 — 08.21</a:t>
             </a:r>
             <a:endParaRPr lang="en-US" sz="1300" dirty="0"/>
           </a:p>
@@ -4985,7 +4987,7 @@
                 <a:ea typeface="Consolas" pitchFamily="34" charset="-122"/>
                 <a:cs typeface="Consolas" pitchFamily="34" charset="-120"/>
               </a:rPr>
-              <a:t>13</a:t>
+              <a:t>15</a:t>
             </a:r>
             <a:endParaRPr lang="en-US" sz="1100" dirty="0"/>
           </a:p>
@@ -5200,9 +5202,1317 @@
                 <a:ea typeface="Consolas" pitchFamily="34" charset="-122"/>
                 <a:cs typeface="Consolas" pitchFamily="34" charset="-120"/>
               </a:rPr>
-              <a:t>디자이너 1  ·  백엔드 2  ·  프론트엔드 1</a:t>
+              <a:t>Chrome 확장 · Firebase · OpenAI</a:t>
             </a:r>
             <a:endParaRPr lang="en-US" sz="1300" dirty="0"/>
+          </a:p>
+        </p:txBody>
+      </p:sp>
+    </p:spTree>
+  </p:cSld>
+  <p:clrMapOvr>
+    <a:masterClrMapping/>
+  </p:clrMapOvr>
+</p:sld>
+</file>
+
+<file path=ppt/slides/slide14.xml><?xml version="1.0" encoding="utf-8"?>
+<p:sld xmlns:a="http://schemas.openxmlformats.org/drawingml/2006/main" xmlns:r="http://schemas.openxmlformats.org/officeDocument/2006/relationships" xmlns:p="http://schemas.openxmlformats.org/presentationml/2006/main">
+  <p:cSld name="Slide 3">
+    <p:bg>
+      <p:bgPr>
+        <a:solidFill>
+          <a:srgbClr val="FFFFFF"/>
+        </a:solidFill>
+      </p:bgPr>
+    </p:bg>
+    <p:spTree>
+      <p:nvGrpSpPr>
+        <p:cNvPr id="1" name=""/>
+        <p:cNvGrpSpPr/>
+        <p:nvPr/>
+      </p:nvGrpSpPr>
+      <p:grpSpPr>
+        <a:xfrm>
+          <a:off x="0" y="0"/>
+          <a:ext cx="0" cy="0"/>
+          <a:chOff x="0" y="0"/>
+          <a:chExt cx="0" cy="0"/>
+        </a:xfrm>
+      </p:grpSpPr>
+      <p:sp>
+        <p:nvSpPr>
+          <p:cNvPr id="2" name="Text 0"/>
+          <p:cNvSpPr/>
+          <p:nvPr/>
+        </p:nvSpPr>
+        <p:spPr>
+          <a:xfrm>
+            <a:off x="822960" y="384048"/>
+            <a:ext cx="914400" cy="274320"/>
+          </a:xfrm>
+          <a:prstGeom prst="rect">
+            <a:avLst/>
+          </a:prstGeom>
+          <a:noFill/>
+          <a:ln/>
+        </p:spPr>
+        <p:txBody>
+          <a:bodyPr wrap="square" lIns="0" tIns="0" rIns="0" bIns="0" rtlCol="0" anchor="ctr"/>
+          <a:lstStyle/>
+          <a:p>
+            <a:pPr indent="0" marL="0">
+              <a:buNone/>
+            </a:pPr>
+            <a:r>
+              <a:rPr lang="en-US" sz="1100" b="1" spc="200" kern="0" dirty="0">
+                <a:solidFill>
+                  <a:srgbClr val="565F6D"/>
+                </a:solidFill>
+                <a:latin typeface="Consolas" pitchFamily="34" charset="0"/>
+                <a:ea typeface="Consolas" pitchFamily="34" charset="-122"/>
+                <a:cs typeface="Consolas" pitchFamily="34" charset="-120"/>
+              </a:rPr>
+              <a:t>13</a:t>
+            </a:r>
+            <a:endParaRPr lang="en-US" sz="1100" dirty="0"/>
+          </a:p>
+        </p:txBody>
+      </p:sp>
+      <p:sp>
+        <p:nvSpPr>
+          <p:cNvPr id="3" name="Text 1"/>
+          <p:cNvSpPr/>
+          <p:nvPr/>
+        </p:nvSpPr>
+        <p:spPr>
+          <a:xfrm>
+            <a:off x="822960" y="868680"/>
+            <a:ext cx="7315200" cy="292608"/>
+          </a:xfrm>
+          <a:prstGeom prst="rect">
+            <a:avLst/>
+          </a:prstGeom>
+          <a:noFill/>
+          <a:ln/>
+        </p:spPr>
+        <p:txBody>
+          <a:bodyPr wrap="square" lIns="0" tIns="0" rIns="0" bIns="0" rtlCol="0" anchor="ctr"/>
+          <a:lstStyle/>
+          <a:p>
+            <a:pPr indent="0" marL="0">
+              <a:buNone/>
+            </a:pPr>
+            <a:r>
+              <a:rPr lang="en-US" sz="1150" b="1" spc="200" kern="0" dirty="0">
+                <a:solidFill>
+                  <a:srgbClr val="BF4900"/>
+                </a:solidFill>
+                <a:latin typeface="Consolas" pitchFamily="34" charset="0"/>
+                <a:ea typeface="Consolas" pitchFamily="34" charset="-122"/>
+                <a:cs typeface="Consolas" pitchFamily="34" charset="-120"/>
+              </a:rPr>
+              <a:t>시장과 수익</a:t>
+            </a:r>
+            <a:endParaRPr lang="en-US" sz="1150" dirty="0"/>
+          </a:p>
+        </p:txBody>
+      </p:sp>
+      <p:sp>
+        <p:nvSpPr>
+          <p:cNvPr id="4" name="Text 2"/>
+          <p:cNvSpPr/>
+          <p:nvPr/>
+        </p:nvSpPr>
+        <p:spPr>
+          <a:xfrm>
+            <a:off x="822960" y="1261872"/>
+            <a:ext cx="10545775" cy="1051560"/>
+          </a:xfrm>
+          <a:prstGeom prst="rect">
+            <a:avLst/>
+          </a:prstGeom>
+          <a:noFill/>
+          <a:ln/>
+        </p:spPr>
+        <p:txBody>
+          <a:bodyPr wrap="square" lIns="0" tIns="0" rIns="0" bIns="0" rtlCol="0" anchor="ctr"/>
+          <a:lstStyle/>
+          <a:p>
+            <a:pPr indent="0" marL="0">
+              <a:lnSpc>
+                <a:spcPts val="4000"/>
+              </a:lnSpc>
+              <a:buNone/>
+            </a:pPr>
+            <a:r>
+              <a:rPr lang="en-US" sz="3400" b="1" dirty="0">
+                <a:solidFill>
+                  <a:srgbClr val="191F28"/>
+                </a:solidFill>
+                <a:latin typeface="Malgun Gothic" pitchFamily="34" charset="0"/>
+                <a:ea typeface="Malgun Gothic" pitchFamily="34" charset="-122"/>
+                <a:cs typeface="Malgun Gothic" pitchFamily="34" charset="-120"/>
+              </a:rPr>
+              <a:t>통역을 둘 수 없는 중간지대</a:t>
+            </a:r>
+            <a:endParaRPr lang="en-US" sz="3400" dirty="0"/>
+          </a:p>
+        </p:txBody>
+      </p:sp>
+      <p:sp>
+        <p:nvSpPr>
+          <p:cNvPr id="5" name="Shape 3"/>
+          <p:cNvSpPr/>
+          <p:nvPr/>
+        </p:nvSpPr>
+        <p:spPr>
+          <a:xfrm>
+            <a:off x="822960" y="2606040"/>
+            <a:ext cx="3332378" cy="1920240"/>
+          </a:xfrm>
+          <a:prstGeom prst="rect">
+            <a:avLst/>
+          </a:prstGeom>
+          <a:solidFill>
+            <a:srgbClr val="F2F4F6"/>
+          </a:solidFill>
+          <a:ln w="12700">
+            <a:solidFill>
+              <a:srgbClr val="F2F4F6"/>
+            </a:solidFill>
+            <a:prstDash val="solid"/>
+          </a:ln>
+        </p:spPr>
+      </p:sp>
+      <p:sp>
+        <p:nvSpPr>
+          <p:cNvPr id="6" name="Text 4"/>
+          <p:cNvSpPr/>
+          <p:nvPr/>
+        </p:nvSpPr>
+        <p:spPr>
+          <a:xfrm>
+            <a:off x="1078992" y="2843784"/>
+            <a:ext cx="2820314" cy="237744"/>
+          </a:xfrm>
+          <a:prstGeom prst="rect">
+            <a:avLst/>
+          </a:prstGeom>
+          <a:noFill/>
+          <a:ln/>
+        </p:spPr>
+        <p:txBody>
+          <a:bodyPr wrap="square" lIns="0" tIns="0" rIns="0" bIns="0" rtlCol="0" anchor="ctr"/>
+          <a:lstStyle/>
+          <a:p>
+            <a:pPr indent="0" marL="0">
+              <a:buNone/>
+            </a:pPr>
+            <a:r>
+              <a:rPr lang="en-US" sz="1000" b="1" spc="150" kern="0" dirty="0">
+                <a:solidFill>
+                  <a:srgbClr val="565F6D"/>
+                </a:solidFill>
+                <a:latin typeface="Consolas" pitchFamily="34" charset="0"/>
+                <a:ea typeface="Consolas" pitchFamily="34" charset="-122"/>
+                <a:cs typeface="Consolas" pitchFamily="34" charset="-120"/>
+              </a:rPr>
+              <a:t>시장 단위</a:t>
+            </a:r>
+            <a:endParaRPr lang="en-US" sz="1000" dirty="0"/>
+          </a:p>
+        </p:txBody>
+      </p:sp>
+      <p:sp>
+        <p:nvSpPr>
+          <p:cNvPr id="7" name="Text 5"/>
+          <p:cNvSpPr/>
+          <p:nvPr/>
+        </p:nvSpPr>
+        <p:spPr>
+          <a:xfrm>
+            <a:off x="1078992" y="3136392"/>
+            <a:ext cx="2820314" cy="502920"/>
+          </a:xfrm>
+          <a:prstGeom prst="rect">
+            <a:avLst/>
+          </a:prstGeom>
+          <a:noFill/>
+          <a:ln/>
+        </p:spPr>
+        <p:txBody>
+          <a:bodyPr wrap="square" lIns="0" tIns="0" rIns="0" bIns="0" rtlCol="0" anchor="ctr"/>
+          <a:lstStyle/>
+          <a:p>
+            <a:pPr indent="0" marL="0">
+              <a:buNone/>
+            </a:pPr>
+            <a:r>
+              <a:rPr lang="en-US" sz="1900" b="1" dirty="0">
+                <a:solidFill>
+                  <a:srgbClr val="191F28"/>
+                </a:solidFill>
+                <a:latin typeface="Malgun Gothic" pitchFamily="34" charset="0"/>
+                <a:ea typeface="Malgun Gothic" pitchFamily="34" charset="-122"/>
+                <a:cs typeface="Malgun Gothic" pitchFamily="34" charset="-120"/>
+              </a:rPr>
+              <a:t>해외 협업 팀</a:t>
+            </a:r>
+            <a:endParaRPr lang="en-US" sz="1900" dirty="0"/>
+          </a:p>
+        </p:txBody>
+      </p:sp>
+      <p:sp>
+        <p:nvSpPr>
+          <p:cNvPr id="8" name="Text 6"/>
+          <p:cNvSpPr/>
+          <p:nvPr/>
+        </p:nvSpPr>
+        <p:spPr>
+          <a:xfrm>
+            <a:off x="1078992" y="3703320"/>
+            <a:ext cx="2820314" cy="621792"/>
+          </a:xfrm>
+          <a:prstGeom prst="rect">
+            <a:avLst/>
+          </a:prstGeom>
+          <a:noFill/>
+          <a:ln/>
+        </p:spPr>
+        <p:txBody>
+          <a:bodyPr wrap="square" lIns="0" tIns="0" rIns="0" bIns="0" rtlCol="0" anchor="t"/>
+          <a:lstStyle/>
+          <a:p>
+            <a:pPr indent="0" marL="0">
+              <a:lnSpc>
+                <a:spcPts val="1900"/>
+              </a:lnSpc>
+              <a:buNone/>
+            </a:pPr>
+            <a:r>
+              <a:rPr lang="en-US" sz="1300" dirty="0">
+                <a:solidFill>
+                  <a:srgbClr val="4E5968"/>
+                </a:solidFill>
+                <a:latin typeface="Malgun Gothic" pitchFamily="34" charset="0"/>
+                <a:ea typeface="Malgun Gothic" pitchFamily="34" charset="-122"/>
+                <a:cs typeface="Malgun Gothic" pitchFamily="34" charset="-120"/>
+              </a:rPr>
+              <a:t>기계번역 시장이 곧 우리 시장은 아니다. 번역기를 만들지 않는다</a:t>
+            </a:r>
+            <a:endParaRPr lang="en-US" sz="1300" dirty="0"/>
+          </a:p>
+        </p:txBody>
+      </p:sp>
+      <p:sp>
+        <p:nvSpPr>
+          <p:cNvPr id="9" name="Shape 7"/>
+          <p:cNvSpPr/>
+          <p:nvPr/>
+        </p:nvSpPr>
+        <p:spPr>
+          <a:xfrm>
+            <a:off x="4429658" y="2606040"/>
+            <a:ext cx="3332378" cy="1920240"/>
+          </a:xfrm>
+          <a:prstGeom prst="rect">
+            <a:avLst/>
+          </a:prstGeom>
+          <a:solidFill>
+            <a:srgbClr val="F2F4F6"/>
+          </a:solidFill>
+          <a:ln w="12700">
+            <a:solidFill>
+              <a:srgbClr val="F2F4F6"/>
+            </a:solidFill>
+            <a:prstDash val="solid"/>
+          </a:ln>
+        </p:spPr>
+      </p:sp>
+      <p:sp>
+        <p:nvSpPr>
+          <p:cNvPr id="10" name="Text 8"/>
+          <p:cNvSpPr/>
+          <p:nvPr/>
+        </p:nvSpPr>
+        <p:spPr>
+          <a:xfrm>
+            <a:off x="4685690" y="2843784"/>
+            <a:ext cx="2820314" cy="237744"/>
+          </a:xfrm>
+          <a:prstGeom prst="rect">
+            <a:avLst/>
+          </a:prstGeom>
+          <a:noFill/>
+          <a:ln/>
+        </p:spPr>
+        <p:txBody>
+          <a:bodyPr wrap="square" lIns="0" tIns="0" rIns="0" bIns="0" rtlCol="0" anchor="ctr"/>
+          <a:lstStyle/>
+          <a:p>
+            <a:pPr indent="0" marL="0">
+              <a:buNone/>
+            </a:pPr>
+            <a:r>
+              <a:rPr lang="en-US" sz="1000" b="1" spc="150" kern="0" dirty="0">
+                <a:solidFill>
+                  <a:srgbClr val="565F6D"/>
+                </a:solidFill>
+                <a:latin typeface="Consolas" pitchFamily="34" charset="0"/>
+                <a:ea typeface="Consolas" pitchFamily="34" charset="-122"/>
+                <a:cs typeface="Consolas" pitchFamily="34" charset="-120"/>
+              </a:rPr>
+              <a:t>국내 규모</a:t>
+            </a:r>
+            <a:endParaRPr lang="en-US" sz="1000" dirty="0"/>
+          </a:p>
+        </p:txBody>
+      </p:sp>
+      <p:sp>
+        <p:nvSpPr>
+          <p:cNvPr id="11" name="Text 9"/>
+          <p:cNvSpPr/>
+          <p:nvPr/>
+        </p:nvSpPr>
+        <p:spPr>
+          <a:xfrm>
+            <a:off x="4685690" y="3136392"/>
+            <a:ext cx="2820314" cy="502920"/>
+          </a:xfrm>
+          <a:prstGeom prst="rect">
+            <a:avLst/>
+          </a:prstGeom>
+          <a:noFill/>
+          <a:ln/>
+        </p:spPr>
+        <p:txBody>
+          <a:bodyPr wrap="square" lIns="0" tIns="0" rIns="0" bIns="0" rtlCol="0" anchor="ctr"/>
+          <a:lstStyle/>
+          <a:p>
+            <a:pPr indent="0" marL="0">
+              <a:buNone/>
+            </a:pPr>
+            <a:r>
+              <a:rPr lang="en-US" sz="1900" b="1" dirty="0">
+                <a:solidFill>
+                  <a:srgbClr val="191F28"/>
+                </a:solidFill>
+                <a:latin typeface="Malgun Gothic" pitchFamily="34" charset="0"/>
+                <a:ea typeface="Malgun Gothic" pitchFamily="34" charset="-122"/>
+                <a:cs typeface="Malgun Gothic" pitchFamily="34" charset="-120"/>
+              </a:rPr>
+              <a:t>25,953개사</a:t>
+            </a:r>
+            <a:endParaRPr lang="en-US" sz="1900" dirty="0"/>
+          </a:p>
+        </p:txBody>
+      </p:sp>
+      <p:sp>
+        <p:nvSpPr>
+          <p:cNvPr id="12" name="Text 10"/>
+          <p:cNvSpPr/>
+          <p:nvPr/>
+        </p:nvSpPr>
+        <p:spPr>
+          <a:xfrm>
+            <a:off x="4685690" y="3703320"/>
+            <a:ext cx="2820314" cy="621792"/>
+          </a:xfrm>
+          <a:prstGeom prst="rect">
+            <a:avLst/>
+          </a:prstGeom>
+          <a:noFill/>
+          <a:ln/>
+        </p:spPr>
+        <p:txBody>
+          <a:bodyPr wrap="square" lIns="0" tIns="0" rIns="0" bIns="0" rtlCol="0" anchor="t"/>
+          <a:lstStyle/>
+          <a:p>
+            <a:pPr indent="0" marL="0">
+              <a:lnSpc>
+                <a:spcPts val="1900"/>
+              </a:lnSpc>
+              <a:buNone/>
+            </a:pPr>
+            <a:r>
+              <a:rPr lang="en-US" sz="1300" dirty="0">
+                <a:solidFill>
+                  <a:srgbClr val="4E5968"/>
+                </a:solidFill>
+                <a:latin typeface="Malgun Gothic" pitchFamily="34" charset="0"/>
+                <a:ea typeface="Malgun Gothic" pitchFamily="34" charset="-122"/>
+                <a:cs typeface="Malgun Gothic" pitchFamily="34" charset="-120"/>
+              </a:rPr>
+              <a:t>2025년 수출 시장 신규 진입 — 최근 5년 내 최대치다</a:t>
+            </a:r>
+            <a:endParaRPr lang="en-US" sz="1300" dirty="0"/>
+          </a:p>
+        </p:txBody>
+      </p:sp>
+      <p:sp>
+        <p:nvSpPr>
+          <p:cNvPr id="13" name="Shape 11"/>
+          <p:cNvSpPr/>
+          <p:nvPr/>
+        </p:nvSpPr>
+        <p:spPr>
+          <a:xfrm>
+            <a:off x="8036357" y="2606040"/>
+            <a:ext cx="3332378" cy="1920240"/>
+          </a:xfrm>
+          <a:prstGeom prst="rect">
+            <a:avLst/>
+          </a:prstGeom>
+          <a:solidFill>
+            <a:srgbClr val="F2F4F6"/>
+          </a:solidFill>
+          <a:ln w="12700">
+            <a:solidFill>
+              <a:srgbClr val="F2F4F6"/>
+            </a:solidFill>
+            <a:prstDash val="solid"/>
+          </a:ln>
+        </p:spPr>
+      </p:sp>
+      <p:sp>
+        <p:nvSpPr>
+          <p:cNvPr id="14" name="Text 12"/>
+          <p:cNvSpPr/>
+          <p:nvPr/>
+        </p:nvSpPr>
+        <p:spPr>
+          <a:xfrm>
+            <a:off x="8292389" y="2843784"/>
+            <a:ext cx="2820314" cy="237744"/>
+          </a:xfrm>
+          <a:prstGeom prst="rect">
+            <a:avLst/>
+          </a:prstGeom>
+          <a:noFill/>
+          <a:ln/>
+        </p:spPr>
+        <p:txBody>
+          <a:bodyPr wrap="square" lIns="0" tIns="0" rIns="0" bIns="0" rtlCol="0" anchor="ctr"/>
+          <a:lstStyle/>
+          <a:p>
+            <a:pPr indent="0" marL="0">
+              <a:buNone/>
+            </a:pPr>
+            <a:r>
+              <a:rPr lang="en-US" sz="1000" b="1" spc="150" kern="0" dirty="0">
+                <a:solidFill>
+                  <a:srgbClr val="565F6D"/>
+                </a:solidFill>
+                <a:latin typeface="Consolas" pitchFamily="34" charset="0"/>
+                <a:ea typeface="Consolas" pitchFamily="34" charset="-122"/>
+                <a:cs typeface="Consolas" pitchFamily="34" charset="-120"/>
+              </a:rPr>
+              <a:t>수익 구조</a:t>
+            </a:r>
+            <a:endParaRPr lang="en-US" sz="1000" dirty="0"/>
+          </a:p>
+        </p:txBody>
+      </p:sp>
+      <p:sp>
+        <p:nvSpPr>
+          <p:cNvPr id="15" name="Text 13"/>
+          <p:cNvSpPr/>
+          <p:nvPr/>
+        </p:nvSpPr>
+        <p:spPr>
+          <a:xfrm>
+            <a:off x="8292389" y="3136392"/>
+            <a:ext cx="2820314" cy="502920"/>
+          </a:xfrm>
+          <a:prstGeom prst="rect">
+            <a:avLst/>
+          </a:prstGeom>
+          <a:noFill/>
+          <a:ln/>
+        </p:spPr>
+        <p:txBody>
+          <a:bodyPr wrap="square" lIns="0" tIns="0" rIns="0" bIns="0" rtlCol="0" anchor="ctr"/>
+          <a:lstStyle/>
+          <a:p>
+            <a:pPr indent="0" marL="0">
+              <a:buNone/>
+            </a:pPr>
+            <a:r>
+              <a:rPr lang="en-US" sz="1900" b="1" dirty="0">
+                <a:solidFill>
+                  <a:srgbClr val="191F28"/>
+                </a:solidFill>
+                <a:latin typeface="Malgun Gothic" pitchFamily="34" charset="0"/>
+                <a:ea typeface="Malgun Gothic" pitchFamily="34" charset="-122"/>
+                <a:cs typeface="Malgun Gothic" pitchFamily="34" charset="-120"/>
+              </a:rPr>
+              <a:t>3층 설계</a:t>
+            </a:r>
+            <a:endParaRPr lang="en-US" sz="1900" dirty="0"/>
+          </a:p>
+        </p:txBody>
+      </p:sp>
+      <p:sp>
+        <p:nvSpPr>
+          <p:cNvPr id="16" name="Text 14"/>
+          <p:cNvSpPr/>
+          <p:nvPr/>
+        </p:nvSpPr>
+        <p:spPr>
+          <a:xfrm>
+            <a:off x="8292389" y="3703320"/>
+            <a:ext cx="2820314" cy="621792"/>
+          </a:xfrm>
+          <a:prstGeom prst="rect">
+            <a:avLst/>
+          </a:prstGeom>
+          <a:noFill/>
+          <a:ln/>
+        </p:spPr>
+        <p:txBody>
+          <a:bodyPr wrap="square" lIns="0" tIns="0" rIns="0" bIns="0" rtlCol="0" anchor="t"/>
+          <a:lstStyle/>
+          <a:p>
+            <a:pPr indent="0" marL="0">
+              <a:lnSpc>
+                <a:spcPts val="1900"/>
+              </a:lnSpc>
+              <a:buNone/>
+            </a:pPr>
+            <a:r>
+              <a:rPr lang="en-US" sz="1300" dirty="0">
+                <a:solidFill>
+                  <a:srgbClr val="4E5968"/>
+                </a:solidFill>
+                <a:latin typeface="Malgun Gothic" pitchFamily="34" charset="0"/>
+                <a:ea typeface="Malgun Gothic" pitchFamily="34" charset="-122"/>
+                <a:cs typeface="Malgun Gothic" pitchFamily="34" charset="-120"/>
+              </a:rPr>
+              <a:t>개인 무료 · 팀 구독(용어집·대시보드·보안) · 인앱 포인트</a:t>
+            </a:r>
+            <a:endParaRPr lang="en-US" sz="1300" dirty="0"/>
+          </a:p>
+        </p:txBody>
+      </p:sp>
+      <p:sp>
+        <p:nvSpPr>
+          <p:cNvPr id="17" name="Shape 15"/>
+          <p:cNvSpPr/>
+          <p:nvPr/>
+        </p:nvSpPr>
+        <p:spPr>
+          <a:xfrm>
+            <a:off x="822960" y="5285232"/>
+            <a:ext cx="50292" cy="914400"/>
+          </a:xfrm>
+          <a:prstGeom prst="rect">
+            <a:avLst/>
+          </a:prstGeom>
+          <a:solidFill>
+            <a:srgbClr val="FF6100"/>
+          </a:solidFill>
+          <a:ln w="12700">
+            <a:solidFill>
+              <a:srgbClr val="FF6100"/>
+            </a:solidFill>
+            <a:prstDash val="solid"/>
+          </a:ln>
+        </p:spPr>
+      </p:sp>
+      <p:sp>
+        <p:nvSpPr>
+          <p:cNvPr id="18" name="Text 16"/>
+          <p:cNvSpPr/>
+          <p:nvPr/>
+        </p:nvSpPr>
+        <p:spPr>
+          <a:xfrm>
+            <a:off x="1060704" y="5230368"/>
+            <a:ext cx="10271455" cy="1024128"/>
+          </a:xfrm>
+          <a:prstGeom prst="rect">
+            <a:avLst/>
+          </a:prstGeom>
+          <a:noFill/>
+          <a:ln/>
+        </p:spPr>
+        <p:txBody>
+          <a:bodyPr wrap="square" lIns="0" tIns="0" rIns="0" bIns="0" rtlCol="0" anchor="ctr"/>
+          <a:lstStyle/>
+          <a:p>
+            <a:pPr indent="0" marL="0">
+              <a:lnSpc>
+                <a:spcPts val="3000"/>
+              </a:lnSpc>
+              <a:buNone/>
+            </a:pPr>
+            <a:r>
+              <a:rPr lang="en-US" sz="2100" b="1" dirty="0">
+                <a:solidFill>
+                  <a:srgbClr val="191F28"/>
+                </a:solidFill>
+                <a:latin typeface="Malgun Gothic" pitchFamily="34" charset="0"/>
+                <a:ea typeface="Malgun Gothic" pitchFamily="34" charset="-122"/>
+                <a:cs typeface="Malgun Gothic" pitchFamily="34" charset="-120"/>
+              </a:rPr>
+              <a:t>통역은 못 두고, 틀려도 되지는 않는다.</a:t>
+            </a:r>
+            <a:endParaRPr lang="en-US" sz="2100" dirty="0"/>
+          </a:p>
+        </p:txBody>
+      </p:sp>
+    </p:spTree>
+  </p:cSld>
+  <p:clrMapOvr>
+    <a:masterClrMapping/>
+  </p:clrMapOvr>
+</p:sld>
+</file>
+
+<file path=ppt/slides/slide15.xml><?xml version="1.0" encoding="utf-8"?>
+<p:sld xmlns:a="http://schemas.openxmlformats.org/drawingml/2006/main" xmlns:r="http://schemas.openxmlformats.org/officeDocument/2006/relationships" xmlns:p="http://schemas.openxmlformats.org/presentationml/2006/main">
+  <p:cSld name="Slide 3">
+    <p:bg>
+      <p:bgPr>
+        <a:solidFill>
+          <a:srgbClr val="FFFFFF"/>
+        </a:solidFill>
+      </p:bgPr>
+    </p:bg>
+    <p:spTree>
+      <p:nvGrpSpPr>
+        <p:cNvPr id="1" name=""/>
+        <p:cNvGrpSpPr/>
+        <p:nvPr/>
+      </p:nvGrpSpPr>
+      <p:grpSpPr>
+        <a:xfrm>
+          <a:off x="0" y="0"/>
+          <a:ext cx="0" cy="0"/>
+          <a:chOff x="0" y="0"/>
+          <a:chExt cx="0" cy="0"/>
+        </a:xfrm>
+      </p:grpSpPr>
+      <p:sp>
+        <p:nvSpPr>
+          <p:cNvPr id="2" name="Text 0"/>
+          <p:cNvSpPr/>
+          <p:nvPr/>
+        </p:nvSpPr>
+        <p:spPr>
+          <a:xfrm>
+            <a:off x="822960" y="384048"/>
+            <a:ext cx="914400" cy="274320"/>
+          </a:xfrm>
+          <a:prstGeom prst="rect">
+            <a:avLst/>
+          </a:prstGeom>
+          <a:noFill/>
+          <a:ln/>
+        </p:spPr>
+        <p:txBody>
+          <a:bodyPr wrap="square" lIns="0" tIns="0" rIns="0" bIns="0" rtlCol="0" anchor="ctr"/>
+          <a:lstStyle/>
+          <a:p>
+            <a:pPr indent="0" marL="0">
+              <a:buNone/>
+            </a:pPr>
+            <a:r>
+              <a:rPr lang="en-US" sz="1100" b="1" spc="200" kern="0" dirty="0">
+                <a:solidFill>
+                  <a:srgbClr val="565F6D"/>
+                </a:solidFill>
+                <a:latin typeface="Consolas" pitchFamily="34" charset="0"/>
+                <a:ea typeface="Consolas" pitchFamily="34" charset="-122"/>
+                <a:cs typeface="Consolas" pitchFamily="34" charset="-120"/>
+              </a:rPr>
+              <a:t>14</a:t>
+            </a:r>
+            <a:endParaRPr lang="en-US" sz="1100" dirty="0"/>
+          </a:p>
+        </p:txBody>
+      </p:sp>
+      <p:sp>
+        <p:nvSpPr>
+          <p:cNvPr id="3" name="Text 1"/>
+          <p:cNvSpPr/>
+          <p:nvPr/>
+        </p:nvSpPr>
+        <p:spPr>
+          <a:xfrm>
+            <a:off x="822960" y="868680"/>
+            <a:ext cx="7315200" cy="292608"/>
+          </a:xfrm>
+          <a:prstGeom prst="rect">
+            <a:avLst/>
+          </a:prstGeom>
+          <a:noFill/>
+          <a:ln/>
+        </p:spPr>
+        <p:txBody>
+          <a:bodyPr wrap="square" lIns="0" tIns="0" rIns="0" bIns="0" rtlCol="0" anchor="ctr"/>
+          <a:lstStyle/>
+          <a:p>
+            <a:pPr indent="0" marL="0">
+              <a:buNone/>
+            </a:pPr>
+            <a:r>
+              <a:rPr lang="en-US" sz="1150" b="1" spc="200" kern="0" dirty="0">
+                <a:solidFill>
+                  <a:srgbClr val="BF4900"/>
+                </a:solidFill>
+                <a:latin typeface="Consolas" pitchFamily="34" charset="0"/>
+                <a:ea typeface="Consolas" pitchFamily="34" charset="-122"/>
+                <a:cs typeface="Consolas" pitchFamily="34" charset="-120"/>
+              </a:rPr>
+              <a:t>실행 전략</a:t>
+            </a:r>
+            <a:endParaRPr lang="en-US" sz="1150" dirty="0"/>
+          </a:p>
+        </p:txBody>
+      </p:sp>
+      <p:sp>
+        <p:nvSpPr>
+          <p:cNvPr id="4" name="Text 2"/>
+          <p:cNvSpPr/>
+          <p:nvPr/>
+        </p:nvSpPr>
+        <p:spPr>
+          <a:xfrm>
+            <a:off x="822960" y="1261872"/>
+            <a:ext cx="10545775" cy="1051560"/>
+          </a:xfrm>
+          <a:prstGeom prst="rect">
+            <a:avLst/>
+          </a:prstGeom>
+          <a:noFill/>
+          <a:ln/>
+        </p:spPr>
+        <p:txBody>
+          <a:bodyPr wrap="square" lIns="0" tIns="0" rIns="0" bIns="0" rtlCol="0" anchor="ctr"/>
+          <a:lstStyle/>
+          <a:p>
+            <a:pPr indent="0" marL="0">
+              <a:lnSpc>
+                <a:spcPts val="4000"/>
+              </a:lnSpc>
+              <a:buNone/>
+            </a:pPr>
+            <a:r>
+              <a:rPr lang="en-US" sz="3400" b="1" dirty="0">
+                <a:solidFill>
+                  <a:srgbClr val="191F28"/>
+                </a:solidFill>
+                <a:latin typeface="Malgun Gothic" pitchFamily="34" charset="0"/>
+                <a:ea typeface="Malgun Gothic" pitchFamily="34" charset="-122"/>
+                <a:cs typeface="Malgun Gothic" pitchFamily="34" charset="-120"/>
+              </a:rPr>
+              <a:t>개인에서 시작해 팀으로 번진다</a:t>
+            </a:r>
+            <a:endParaRPr lang="en-US" sz="3400" dirty="0"/>
+          </a:p>
+        </p:txBody>
+      </p:sp>
+      <p:sp>
+        <p:nvSpPr>
+          <p:cNvPr id="5" name="Shape 3"/>
+          <p:cNvSpPr/>
+          <p:nvPr/>
+        </p:nvSpPr>
+        <p:spPr>
+          <a:xfrm>
+            <a:off x="822960" y="2606040"/>
+            <a:ext cx="3332378" cy="1920240"/>
+          </a:xfrm>
+          <a:prstGeom prst="rect">
+            <a:avLst/>
+          </a:prstGeom>
+          <a:solidFill>
+            <a:srgbClr val="F2F4F6"/>
+          </a:solidFill>
+          <a:ln w="12700">
+            <a:solidFill>
+              <a:srgbClr val="F2F4F6"/>
+            </a:solidFill>
+            <a:prstDash val="solid"/>
+          </a:ln>
+        </p:spPr>
+      </p:sp>
+      <p:sp>
+        <p:nvSpPr>
+          <p:cNvPr id="6" name="Text 4"/>
+          <p:cNvSpPr/>
+          <p:nvPr/>
+        </p:nvSpPr>
+        <p:spPr>
+          <a:xfrm>
+            <a:off x="1078992" y="2843784"/>
+            <a:ext cx="2820314" cy="237744"/>
+          </a:xfrm>
+          <a:prstGeom prst="rect">
+            <a:avLst/>
+          </a:prstGeom>
+          <a:noFill/>
+          <a:ln/>
+        </p:spPr>
+        <p:txBody>
+          <a:bodyPr wrap="square" lIns="0" tIns="0" rIns="0" bIns="0" rtlCol="0" anchor="ctr"/>
+          <a:lstStyle/>
+          <a:p>
+            <a:pPr indent="0" marL="0">
+              <a:buNone/>
+            </a:pPr>
+            <a:r>
+              <a:rPr lang="en-US" sz="1000" b="1" spc="150" kern="0" dirty="0">
+                <a:solidFill>
+                  <a:srgbClr val="565F6D"/>
+                </a:solidFill>
+                <a:latin typeface="Consolas" pitchFamily="34" charset="0"/>
+                <a:ea typeface="Consolas" pitchFamily="34" charset="-122"/>
+                <a:cs typeface="Consolas" pitchFamily="34" charset="-120"/>
+              </a:rPr>
+              <a:t>확산 구조</a:t>
+            </a:r>
+            <a:endParaRPr lang="en-US" sz="1000" dirty="0"/>
+          </a:p>
+        </p:txBody>
+      </p:sp>
+      <p:sp>
+        <p:nvSpPr>
+          <p:cNvPr id="7" name="Text 5"/>
+          <p:cNvSpPr/>
+          <p:nvPr/>
+        </p:nvSpPr>
+        <p:spPr>
+          <a:xfrm>
+            <a:off x="1078992" y="3136392"/>
+            <a:ext cx="2820314" cy="502920"/>
+          </a:xfrm>
+          <a:prstGeom prst="rect">
+            <a:avLst/>
+          </a:prstGeom>
+          <a:noFill/>
+          <a:ln/>
+        </p:spPr>
+        <p:txBody>
+          <a:bodyPr wrap="square" lIns="0" tIns="0" rIns="0" bIns="0" rtlCol="0" anchor="ctr"/>
+          <a:lstStyle/>
+          <a:p>
+            <a:pPr indent="0" marL="0">
+              <a:buNone/>
+            </a:pPr>
+            <a:r>
+              <a:rPr lang="en-US" sz="1900" b="1" dirty="0">
+                <a:solidFill>
+                  <a:srgbClr val="191F28"/>
+                </a:solidFill>
+                <a:latin typeface="Malgun Gothic" pitchFamily="34" charset="0"/>
+                <a:ea typeface="Malgun Gothic" pitchFamily="34" charset="-122"/>
+                <a:cs typeface="Malgun Gothic" pitchFamily="34" charset="-120"/>
+              </a:rPr>
+              <a:t>Bottom-up</a:t>
+            </a:r>
+            <a:endParaRPr lang="en-US" sz="1900" dirty="0"/>
+          </a:p>
+        </p:txBody>
+      </p:sp>
+      <p:sp>
+        <p:nvSpPr>
+          <p:cNvPr id="8" name="Text 6"/>
+          <p:cNvSpPr/>
+          <p:nvPr/>
+        </p:nvSpPr>
+        <p:spPr>
+          <a:xfrm>
+            <a:off x="1078992" y="3703320"/>
+            <a:ext cx="2820314" cy="621792"/>
+          </a:xfrm>
+          <a:prstGeom prst="rect">
+            <a:avLst/>
+          </a:prstGeom>
+          <a:noFill/>
+          <a:ln/>
+        </p:spPr>
+        <p:txBody>
+          <a:bodyPr wrap="square" lIns="0" tIns="0" rIns="0" bIns="0" rtlCol="0" anchor="t"/>
+          <a:lstStyle/>
+          <a:p>
+            <a:pPr indent="0" marL="0">
+              <a:lnSpc>
+                <a:spcPts val="1900"/>
+              </a:lnSpc>
+              <a:buNone/>
+            </a:pPr>
+            <a:r>
+              <a:rPr lang="en-US" sz="1300" dirty="0">
+                <a:solidFill>
+                  <a:srgbClr val="4E5968"/>
+                </a:solidFill>
+                <a:latin typeface="Malgun Gothic" pitchFamily="34" charset="0"/>
+                <a:ea typeface="Malgun Gothic" pitchFamily="34" charset="-122"/>
+                <a:cs typeface="Malgun Gothic" pitchFamily="34" charset="-120"/>
+              </a:rPr>
+              <a:t>결재 없이 설치된다. 용어집·수신자 설정이 팀으로 번진다</a:t>
+            </a:r>
+            <a:endParaRPr lang="en-US" sz="1300" dirty="0"/>
+          </a:p>
+        </p:txBody>
+      </p:sp>
+      <p:sp>
+        <p:nvSpPr>
+          <p:cNvPr id="9" name="Shape 7"/>
+          <p:cNvSpPr/>
+          <p:nvPr/>
+        </p:nvSpPr>
+        <p:spPr>
+          <a:xfrm>
+            <a:off x="4429658" y="2606040"/>
+            <a:ext cx="3332378" cy="1920240"/>
+          </a:xfrm>
+          <a:prstGeom prst="rect">
+            <a:avLst/>
+          </a:prstGeom>
+          <a:solidFill>
+            <a:srgbClr val="F2F4F6"/>
+          </a:solidFill>
+          <a:ln w="12700">
+            <a:solidFill>
+              <a:srgbClr val="F2F4F6"/>
+            </a:solidFill>
+            <a:prstDash val="solid"/>
+          </a:ln>
+        </p:spPr>
+      </p:sp>
+      <p:sp>
+        <p:nvSpPr>
+          <p:cNvPr id="10" name="Text 8"/>
+          <p:cNvSpPr/>
+          <p:nvPr/>
+        </p:nvSpPr>
+        <p:spPr>
+          <a:xfrm>
+            <a:off x="4685690" y="2843784"/>
+            <a:ext cx="2820314" cy="237744"/>
+          </a:xfrm>
+          <a:prstGeom prst="rect">
+            <a:avLst/>
+          </a:prstGeom>
+          <a:noFill/>
+          <a:ln/>
+        </p:spPr>
+        <p:txBody>
+          <a:bodyPr wrap="square" lIns="0" tIns="0" rIns="0" bIns="0" rtlCol="0" anchor="ctr"/>
+          <a:lstStyle/>
+          <a:p>
+            <a:pPr indent="0" marL="0">
+              <a:buNone/>
+            </a:pPr>
+            <a:r>
+              <a:rPr lang="en-US" sz="1000" b="1" spc="150" kern="0" dirty="0">
+                <a:solidFill>
+                  <a:srgbClr val="565F6D"/>
+                </a:solidFill>
+                <a:latin typeface="Consolas" pitchFamily="34" charset="0"/>
+                <a:ea typeface="Consolas" pitchFamily="34" charset="-122"/>
+                <a:cs typeface="Consolas" pitchFamily="34" charset="-120"/>
+              </a:rPr>
+              <a:t>초기 타깃</a:t>
+            </a:r>
+            <a:endParaRPr lang="en-US" sz="1000" dirty="0"/>
+          </a:p>
+        </p:txBody>
+      </p:sp>
+      <p:sp>
+        <p:nvSpPr>
+          <p:cNvPr id="11" name="Text 9"/>
+          <p:cNvSpPr/>
+          <p:nvPr/>
+        </p:nvSpPr>
+        <p:spPr>
+          <a:xfrm>
+            <a:off x="4685690" y="3136392"/>
+            <a:ext cx="2820314" cy="502920"/>
+          </a:xfrm>
+          <a:prstGeom prst="rect">
+            <a:avLst/>
+          </a:prstGeom>
+          <a:noFill/>
+          <a:ln/>
+        </p:spPr>
+        <p:txBody>
+          <a:bodyPr wrap="square" lIns="0" tIns="0" rIns="0" bIns="0" rtlCol="0" anchor="ctr"/>
+          <a:lstStyle/>
+          <a:p>
+            <a:pPr indent="0" marL="0">
+              <a:buNone/>
+            </a:pPr>
+            <a:r>
+              <a:rPr lang="en-US" sz="1900" b="1" dirty="0">
+                <a:solidFill>
+                  <a:srgbClr val="191F28"/>
+                </a:solidFill>
+                <a:latin typeface="Malgun Gothic" pitchFamily="34" charset="0"/>
+                <a:ea typeface="Malgun Gothic" pitchFamily="34" charset="-122"/>
+                <a:cs typeface="Malgun Gothic" pitchFamily="34" charset="-120"/>
+              </a:rPr>
+              <a:t>개발 조직</a:t>
+            </a:r>
+            <a:endParaRPr lang="en-US" sz="1900" dirty="0"/>
+          </a:p>
+        </p:txBody>
+      </p:sp>
+      <p:sp>
+        <p:nvSpPr>
+          <p:cNvPr id="12" name="Text 10"/>
+          <p:cNvSpPr/>
+          <p:nvPr/>
+        </p:nvSpPr>
+        <p:spPr>
+          <a:xfrm>
+            <a:off x="4685690" y="3703320"/>
+            <a:ext cx="2820314" cy="621792"/>
+          </a:xfrm>
+          <a:prstGeom prst="rect">
+            <a:avLst/>
+          </a:prstGeom>
+          <a:noFill/>
+          <a:ln/>
+        </p:spPr>
+        <p:txBody>
+          <a:bodyPr wrap="square" lIns="0" tIns="0" rIns="0" bIns="0" rtlCol="0" anchor="t"/>
+          <a:lstStyle/>
+          <a:p>
+            <a:pPr indent="0" marL="0">
+              <a:lnSpc>
+                <a:spcPts val="1900"/>
+              </a:lnSpc>
+              <a:buNone/>
+            </a:pPr>
+            <a:r>
+              <a:rPr lang="en-US" sz="1300" dirty="0">
+                <a:solidFill>
+                  <a:srgbClr val="4E5968"/>
+                </a:solidFill>
+                <a:latin typeface="Malgun Gothic" pitchFamily="34" charset="0"/>
+                <a:ea typeface="Malgun Gothic" pitchFamily="34" charset="-122"/>
+                <a:cs typeface="Malgun Gothic" pitchFamily="34" charset="-120"/>
+              </a:rPr>
+              <a:t>코드 리뷰·장애 대응은 오해의 비용이 즉시 드러난다</a:t>
+            </a:r>
+            <a:endParaRPr lang="en-US" sz="1300" dirty="0"/>
+          </a:p>
+        </p:txBody>
+      </p:sp>
+      <p:sp>
+        <p:nvSpPr>
+          <p:cNvPr id="13" name="Shape 11"/>
+          <p:cNvSpPr/>
+          <p:nvPr/>
+        </p:nvSpPr>
+        <p:spPr>
+          <a:xfrm>
+            <a:off x="8036357" y="2606040"/>
+            <a:ext cx="3332378" cy="1920240"/>
+          </a:xfrm>
+          <a:prstGeom prst="rect">
+            <a:avLst/>
+          </a:prstGeom>
+          <a:solidFill>
+            <a:srgbClr val="F2F4F6"/>
+          </a:solidFill>
+          <a:ln w="12700">
+            <a:solidFill>
+              <a:srgbClr val="F2F4F6"/>
+            </a:solidFill>
+            <a:prstDash val="solid"/>
+          </a:ln>
+        </p:spPr>
+      </p:sp>
+      <p:sp>
+        <p:nvSpPr>
+          <p:cNvPr id="14" name="Text 12"/>
+          <p:cNvSpPr/>
+          <p:nvPr/>
+        </p:nvSpPr>
+        <p:spPr>
+          <a:xfrm>
+            <a:off x="8292389" y="2843784"/>
+            <a:ext cx="2820314" cy="237744"/>
+          </a:xfrm>
+          <a:prstGeom prst="rect">
+            <a:avLst/>
+          </a:prstGeom>
+          <a:noFill/>
+          <a:ln/>
+        </p:spPr>
+        <p:txBody>
+          <a:bodyPr wrap="square" lIns="0" tIns="0" rIns="0" bIns="0" rtlCol="0" anchor="ctr"/>
+          <a:lstStyle/>
+          <a:p>
+            <a:pPr indent="0" marL="0">
+              <a:buNone/>
+            </a:pPr>
+            <a:r>
+              <a:rPr lang="en-US" sz="1000" b="1" spc="150" kern="0" dirty="0">
+                <a:solidFill>
+                  <a:srgbClr val="565F6D"/>
+                </a:solidFill>
+                <a:latin typeface="Consolas" pitchFamily="34" charset="0"/>
+                <a:ea typeface="Consolas" pitchFamily="34" charset="-122"/>
+                <a:cs typeface="Consolas" pitchFamily="34" charset="-120"/>
+              </a:rPr>
+              <a:t>경쟁 우위</a:t>
+            </a:r>
+            <a:endParaRPr lang="en-US" sz="1000" dirty="0"/>
+          </a:p>
+        </p:txBody>
+      </p:sp>
+      <p:sp>
+        <p:nvSpPr>
+          <p:cNvPr id="15" name="Text 13"/>
+          <p:cNvSpPr/>
+          <p:nvPr/>
+        </p:nvSpPr>
+        <p:spPr>
+          <a:xfrm>
+            <a:off x="8292389" y="3136392"/>
+            <a:ext cx="2820314" cy="502920"/>
+          </a:xfrm>
+          <a:prstGeom prst="rect">
+            <a:avLst/>
+          </a:prstGeom>
+          <a:noFill/>
+          <a:ln/>
+        </p:spPr>
+        <p:txBody>
+          <a:bodyPr wrap="square" lIns="0" tIns="0" rIns="0" bIns="0" rtlCol="0" anchor="ctr"/>
+          <a:lstStyle/>
+          <a:p>
+            <a:pPr indent="0" marL="0">
+              <a:buNone/>
+            </a:pPr>
+            <a:r>
+              <a:rPr lang="en-US" sz="1900" b="1" dirty="0">
+                <a:solidFill>
+                  <a:srgbClr val="191F28"/>
+                </a:solidFill>
+                <a:latin typeface="Malgun Gothic" pitchFamily="34" charset="0"/>
+                <a:ea typeface="Malgun Gothic" pitchFamily="34" charset="-122"/>
+                <a:cs typeface="Malgun Gothic" pitchFamily="34" charset="-120"/>
+              </a:rPr>
+              <a:t>데이터 해자</a:t>
+            </a:r>
+            <a:endParaRPr lang="en-US" sz="1900" dirty="0"/>
+          </a:p>
+        </p:txBody>
+      </p:sp>
+      <p:sp>
+        <p:nvSpPr>
+          <p:cNvPr id="16" name="Text 14"/>
+          <p:cNvSpPr/>
+          <p:nvPr/>
+        </p:nvSpPr>
+        <p:spPr>
+          <a:xfrm>
+            <a:off x="8292389" y="3703320"/>
+            <a:ext cx="2820314" cy="621792"/>
+          </a:xfrm>
+          <a:prstGeom prst="rect">
+            <a:avLst/>
+          </a:prstGeom>
+          <a:noFill/>
+          <a:ln/>
+        </p:spPr>
+        <p:txBody>
+          <a:bodyPr wrap="square" lIns="0" tIns="0" rIns="0" bIns="0" rtlCol="0" anchor="t"/>
+          <a:lstStyle/>
+          <a:p>
+            <a:pPr indent="0" marL="0">
+              <a:lnSpc>
+                <a:spcPts val="1900"/>
+              </a:lnSpc>
+              <a:buNone/>
+            </a:pPr>
+            <a:r>
+              <a:rPr lang="en-US" sz="1300" dirty="0">
+                <a:solidFill>
+                  <a:srgbClr val="4E5968"/>
+                </a:solidFill>
+                <a:latin typeface="Malgun Gothic" pitchFamily="34" charset="0"/>
+                <a:ea typeface="Malgun Gothic" pitchFamily="34" charset="-122"/>
+                <a:cs typeface="Malgun Gothic" pitchFamily="34" charset="-120"/>
+              </a:rPr>
+              <a:t>Grammarly는 내 글을 다듬고, 우리는 수신자를 쌓는다</a:t>
+            </a:r>
+            <a:endParaRPr lang="en-US" sz="1300" dirty="0"/>
+          </a:p>
+        </p:txBody>
+      </p:sp>
+      <p:sp>
+        <p:nvSpPr>
+          <p:cNvPr id="17" name="Shape 15"/>
+          <p:cNvSpPr/>
+          <p:nvPr/>
+        </p:nvSpPr>
+        <p:spPr>
+          <a:xfrm>
+            <a:off x="822960" y="5285232"/>
+            <a:ext cx="50292" cy="914400"/>
+          </a:xfrm>
+          <a:prstGeom prst="rect">
+            <a:avLst/>
+          </a:prstGeom>
+          <a:solidFill>
+            <a:srgbClr val="FF6100"/>
+          </a:solidFill>
+          <a:ln w="12700">
+            <a:solidFill>
+              <a:srgbClr val="FF6100"/>
+            </a:solidFill>
+            <a:prstDash val="solid"/>
+          </a:ln>
+        </p:spPr>
+      </p:sp>
+      <p:sp>
+        <p:nvSpPr>
+          <p:cNvPr id="18" name="Text 16"/>
+          <p:cNvSpPr/>
+          <p:nvPr/>
+        </p:nvSpPr>
+        <p:spPr>
+          <a:xfrm>
+            <a:off x="1060704" y="5230368"/>
+            <a:ext cx="10271455" cy="1024128"/>
+          </a:xfrm>
+          <a:prstGeom prst="rect">
+            <a:avLst/>
+          </a:prstGeom>
+          <a:noFill/>
+          <a:ln/>
+        </p:spPr>
+        <p:txBody>
+          <a:bodyPr wrap="square" lIns="0" tIns="0" rIns="0" bIns="0" rtlCol="0" anchor="ctr"/>
+          <a:lstStyle/>
+          <a:p>
+            <a:pPr indent="0" marL="0">
+              <a:lnSpc>
+                <a:spcPts val="3000"/>
+              </a:lnSpc>
+              <a:buNone/>
+            </a:pPr>
+            <a:r>
+              <a:rPr lang="en-US" sz="2100" b="1" dirty="0">
+                <a:solidFill>
+                  <a:srgbClr val="191F28"/>
+                </a:solidFill>
+                <a:latin typeface="Malgun Gothic" pitchFamily="34" charset="0"/>
+                <a:ea typeface="Malgun Gothic" pitchFamily="34" charset="-122"/>
+                <a:cs typeface="Malgun Gothic" pitchFamily="34" charset="-120"/>
+              </a:rPr>
+              <a:t>기능은 베껴도 실측 규칙은 못 베낀다.</a:t>
+            </a:r>
+            <a:endParaRPr lang="en-US" sz="2100" dirty="0"/>
           </a:p>
         </p:txBody>
       </p:sp>
